--- a/eMudhra-response-briefing.pptx
+++ b/eMudhra-response-briefing.pptx
@@ -122,19 +122,19 @@
   <p:extLst>
     <p:ext uri="{521415D9-36F7-43E2-AB2F-B90AF26B5E84}">
       <p14:sectionLst xmlns:p14="http://schemas.microsoft.com/office/powerpoint/2010/main">
-        <p14:section name="Opening" id="{df40291f-d620-804a-6ccc-e20407d2740e}">
+        <p14:section name="Opening" id="{b7714190-770d-4a63-55a9-03068ff45cbb}">
           <p14:sldIdLst>
             <p14:sldId id="256"/>
             <p14:sldId id="257"/>
           </p14:sldIdLst>
         </p14:section>
-        <p14:section name="Situation" id="{ac8382cd-6382-ba3c-04c2-07a565a50695}">
+        <p14:section name="Situation" id="{5869545a-7968-4be3-d96c-81a9a0e569d2}">
           <p14:sldIdLst>
             <p14:sldId id="258"/>
             <p14:sldId id="259"/>
           </p14:sldIdLst>
         </p14:section>
-        <p14:section name="Approach" id="{dadaf7ec-4a39-0325-604b-f8e2161604f3}">
+        <p14:section name="Approach" id="{4cd2c67a-ed10-cfa1-7a57-7455903892c9}">
           <p14:sldIdLst>
             <p14:sldId id="260"/>
             <p14:sldId id="261"/>
@@ -144,20 +144,20 @@
             <p14:sldId id="265"/>
           </p14:sldIdLst>
         </p14:section>
-        <p14:section name="Requirements" id="{e8c048d9-8220-52aa-c77c-cd044663154e}">
+        <p14:section name="Requirements" id="{f5a4f648-e532-e3f7-476c-780e569a2a03}">
           <p14:sldIdLst>
             <p14:sldId id="266"/>
             <p14:sldId id="267"/>
             <p14:sldId id="268"/>
           </p14:sldIdLst>
         </p14:section>
-        <p14:section name="Plan and decisions" id="{a4e4603e-f7fd-7e82-1e90-636ce23905b4}">
+        <p14:section name="Plan and decisions" id="{c9e8825a-ee70-3531-8435-66c1a834db0f}">
           <p14:sldIdLst>
             <p14:sldId id="269"/>
             <p14:sldId id="270"/>
           </p14:sldIdLst>
         </p14:section>
-        <p14:section name="Appendix" id="{42664061-5a18-70f0-ba83-6f1971b38a0b}">
+        <p14:section name="Appendix" id="{5ccd04f0-93d7-4bdb-a39b-73282a437df5}">
           <p14:sldIdLst>
             <p14:sldId id="271"/>
           </p14:sldIdLst>
@@ -566,7 +566,7 @@
           <a:p>
             <a:r>
               <a:rPr lang="en-US" dirty="0"/>
-              <a:t>Purpose: agree how we prioritise, what every service owner returns, and five decisions we need this week. The browser and OS vendors have done most of the work for desktops. Our job is to confirm that coverage and then find the software that keeps its own trust list. This deck draws on the eMudhraResponse pack dated 24 October and the review dated 26 October.</a:t>
+              <a:t>Purpose: agree how we prioritise, what every service owner returns, and the decisions we need this week. The browser and OS vendors have done most of the work for desktops. Our job is to confirm that coverage and then find the software that keeps its own trust list. This deck summarises version 2 of the eMudhraResponse pack (26 October); the markdown documents hold the detail and references.</a:t>
             </a:r>
             <a:endParaRPr lang="en-US" dirty="0"/>
           </a:p>
@@ -654,7 +654,7 @@
           <a:p>
             <a:r>
               <a:rPr lang="en-US" dirty="0"/>
-              <a:t>The pack says no mandatory historical investigation for every application, which is fair. But a small targeted hunt is cheap and decisive. If eMudhra's statement holds, there should be no legitimate certificates under these intermediates at all, so any match outside test hosts is an incident. Start with EDR signer data for the code-signing intermediates and inspection-proxy logs for the TLS ones. Be honest about retention: we won't have 18 months of most logs.</a:t>
+              <a:t>This is a small targeted hunt, not a historical investigation of every application. If eMudhra's statement holds, there should be no legitimate certificates under these intermediates at all, so any match outside test hosts is an incident. Start with EDR signer data for the code-signing intermediates and inspection-proxy logs for the TLS ones. Be honest about retention: we won't have 18 months of most logs. Detail: ACTION_PLAN.md section 8 and PB-14.</a:t>
             </a:r>
             <a:endParaRPr lang="en-US" dirty="0"/>
           </a:p>
@@ -742,7 +742,7 @@
           <a:p>
             <a:r>
               <a:rPr lang="en-US" dirty="0"/>
-              <a:t>This is unchanged from the pack, and it's the right design for an enterprise: one record per service, three closure routes, and platform teams publish evidence once so applications can reference it. The rules at the bottom are the mistakes we expect most often.</a:t>
+              <a:t>This is the closure model in ACTION_PLAN.md section 4 and COMPLETION_TRACKER.md: one record per service, three closure routes, and platform teams publish evidence once so applications can reference it. The rules at the bottom are the mistakes we expect most often.</a:t>
             </a:r>
             <a:endParaRPr lang="en-US" dirty="0"/>
           </a:p>
@@ -918,7 +918,7 @@
           <a:p>
             <a:r>
               <a:rPr lang="en-US" dirty="0"/>
-              <a:t>This answers the findability question. The pack's technical content is good, but it sits in one long document ordered by vendor mechanism. Each playbook opens with a yes/no 'applies if' test, then options in order of preference, a verification step that proves the running workload uses the fix, what to record, and when to escalate. The workbook tracker has a playbook column, so every record shows which steps were used.</a:t>
+              <a:t>What goes to delivery teams: one document, playbooks/README.md. It tells them what has happened, what to do, what to return and by when, and links to their playbook. Each playbook opens with a yes/no 'applies if' test, then options in order of preference, a verification step that proves the running workload uses the fix, what to record, and when to escalate. The workbook tracker has a playbook column, so every record shows which steps were used.</a:t>
             </a:r>
             <a:endParaRPr lang="en-US" dirty="0"/>
           </a:p>
@@ -1182,7 +1182,7 @@
           <a:p>
             <a:r>
               <a:rPr lang="en-US" dirty="0"/>
-              <a:t>This slide shows the evidence base and its limits. Package facts were checked directly from PyPI, crates.io, the Go module proxy and the Ubuntu changelog. Vendor browser and OS actions come from press coverage of vendor statements, because the review environment couldn't reach the primary pages. The response lead should confirm those before the pack is reissued.</a:t>
+              <a:t>This slide shows the evidence base and its limits. Package facts were checked directly from PyPI, crates.io, the Go module proxy and the Ubuntu changelog. Vendor browser and OS actions come from press coverage of vendor statements, because the primary pages couldn't be reached when version 2 was prepared. The incident lead should confirm those before relying on a detail. Each markdown document lists its sources in its References section.</a:t>
             </a:r>
             <a:endParaRPr lang="en-US" dirty="0"/>
           </a:p>
@@ -1446,7 +1446,7 @@
           <a:p>
             <a:r>
               <a:rPr lang="en-US" dirty="0"/>
-              <a:t>This is the pack's best insight, sharpened. A public website presenting its own certificate is not the risk. The risk is any system that validates someone else's certificate using a trust list that hasn't been updated. Column C is the long tail. The proxy deserves special mention because it reverses the browser story: behind TLS inspection, the browser's protection is irrelevant.</a:t>
+              <a:t>A public website presenting its own certificate is not the risk. The risk is any system that validates someone else's certificate using a trust list that hasn't been updated. Column C is most of the long tail. The proxy deserves special mention because it reverses the browser story: behind TLS inspection, the browser's protection is irrelevant. Definitions are in RISK_TIERS.md section 3.</a:t>
             </a:r>
             <a:endParaRPr lang="en-US" dirty="0"/>
           </a:p>
@@ -1534,7 +1534,7 @@
           <a:p>
             <a:r>
               <a:rPr lang="en-US" dirty="0"/>
-              <a:t>Answer to the question: yes, we put a proviso on the browser position. Vendors fixed browsers without user action, but an enterprise can break that through blocked update endpoints, disabled auto-update, TLS inspection or stale images. Evidence is one representative test per managed configuration plus the device-management coverage report. Don't ask every user to test. The workbook's Browser &amp; desktop sheet calculates whether each configuration meets the proviso.</a:t>
+              <a:t>Vendors fixed browsers without user action, but an enterprise can break that through blocked update endpoints, disabled auto-update, TLS inspection or stale images. So we record them as Validated only with a coverage report: one representative test per managed configuration plus the device-management report. Don't ask every user to test. The canonical text is ACTION_PLAN.md section 5, and the workbook's Browser &amp; desktop sheet calculates whether each configuration meets the proviso.</a:t>
             </a:r>
             <a:endParaRPr lang="en-US" dirty="0"/>
           </a:p>
@@ -1622,7 +1622,7 @@
           <a:p>
             <a:r>
               <a:rPr lang="en-US" dirty="0"/>
-              <a:t>Agreeing with the framing: once browsers are confirmed, the rest is the long tail of internet-, application- and certificate-dependent systems. The fastest way to list it is egress telemetry: every system that matters makes outbound TLS calls, and our proxy and firewall logs already record them. Direct-to-internet connections that bypass the proxy are a finding in their own right. The tail won't close on one date, so we propose a cut-off (D-09) after which unremediated items need an exception with a compensating control.</a:t>
+              <a:t>Once browsers are confirmed, the rest is the long tail of internet-, application- and certificate-dependent systems. The fastest way to list it is egress telemetry: every system that matters makes outbound TLS calls, and our proxy and firewall logs already record them. Direct-to-internet connections that bypass the proxy are a finding in their own right. The tail won't close on one date, so we propose a cut-off of 25 November (D-09), after which unremediated items need an exception with a compensating control. Detail: ACTION_PLAN.md section 6.</a:t>
             </a:r>
             <a:endParaRPr lang="en-US" dirty="0"/>
           </a:p>
@@ -1710,7 +1710,7 @@
           <a:p>
             <a:r>
               <a:rPr lang="en-US" dirty="0"/>
-              <a:t>Does the tiering make sense? The principle does. But Tier 2 mixed vendor-protected browsers with the most exposed population, outbound API clients on frozen bundles. This matrix keeps the pack's tiers as the impact rating and adds verifier susceptibility. Browsers drop to P3/P4 under the proviso; a high-impact Java or Go client rises to P1. The windows are indicative for the incident lead to approve, because 'agree a date with the owner' alone tends to slip.</a:t>
+              <a:t>Version 1 ranked by impact and asset class, so Tier 2 mixed vendor-protected browsers with the most exposed population: outbound API clients on frozen bundles. Version 2 keeps impact and adds verifier susceptibility. Browsers drop to P3 or P4 under the proviso; a high-impact Java or Go client rises to P1. The windows are indicative for approval (D-03), because 'agree a date with the owner' alone tends to slip. Detail: RISK_TIERS.md.</a:t>
             </a:r>
             <a:endParaRPr lang="en-US" dirty="0"/>
           </a:p>
@@ -1798,7 +1798,7 @@
           <a:p>
             <a:r>
               <a:rPr lang="en-US" dirty="0"/>
-              <a:t>These are the paths where impersonation becomes something worse. The pack lists some of them as Tier 1 examples, but it doesn't name identity fetches, artifact proxies, or code-signing and application control. Each card points to its playbook. The inspection proxy goes first because one fix protects the most clients.</a:t>
+              <a:t>These are the paths where impersonation becomes something worse: token forgery, credential theft or code execution. They are listed in RISK_TIERS.md section 5, and each card points to its playbook. The inspection proxy goes first because one fix protects the most clients.</a:t>
             </a:r>
             <a:endParaRPr lang="en-US" dirty="0"/>
           </a:p>
@@ -1886,7 +1886,7 @@
           <a:p>
             <a:r>
               <a:rPr lang="en-US" dirty="0"/>
-              <a:t>The pack mentions availability only in a footnote, and doesn't mention the 27 October change. A certificate issued to us by eMudhra isn't compromised; it will just stop being trusted. The bigger, quieter effect is on partners: when we update certifi, webpki-roots or the OS bundle, any partner still using that root breaks for our clients. We checked the package contents directly. Don't fix breakages by restoring the root globally.</a:t>
+              <a:t>A certificate issued to us by eMudhra isn't compromised; it will just stop being trusted. The bigger, quieter effect is on partners: when we update certifi, webpki-roots or the OS bundle, any partner still using that root breaks for our clients. We checked the package contents directly. Don't fix breakages by restoring the root globally. Detail: ACTION_PLAN.md section 7 and PB-13.</a:t>
             </a:r>
             <a:endParaRPr lang="en-US" dirty="0"/>
           </a:p>
@@ -4937,7 +4937,7 @@
                 <a:ea typeface="Calibri" pitchFamily="34" charset="-122"/>
                 <a:cs typeface="Calibri" pitchFamily="34" charset="-120"/>
               </a:rPr>
-              <a:t>From the eMudhraResponse pack (ACTION_PLAN, COMPLETION_TRACKER), retained unchanged. Tracker columns are in the workbook's Service tracker sheet.</a:t>
+              <a:t>From ACTION_PLAN.md section 4 and COMPLETION_TRACKER.md. Tracker columns are in the workbook's Service tracker sheet.</a:t>
             </a:r>
             <a:endParaRPr lang="en-US" sz="1000" dirty="0"/>
           </a:p>
@@ -5160,7 +5160,7 @@
                   <a:schemeClr val="tx1"/>
                 </a:solidFill>
               </a:rPr>
-              <a:t>Tier/priority and rationale</a:t>
+              <a:t>Priority and rationale</a:t>
             </a:r>
             <a:endParaRPr lang="en-US" sz="1500" dirty="0"/>
           </a:p>
@@ -8444,7 +8444,7 @@
                 <a:ea typeface="Calibri" pitchFamily="34" charset="-122"/>
                 <a:cs typeface="Calibri" pitchFamily="34" charset="-120"/>
               </a:rPr>
-              <a:t>Indexed by team and by what you run, in playbooks/README.md</a:t>
+              <a:t>Send delivery teams one document: playbooks/README.md, the team guide</a:t>
             </a:r>
             <a:endParaRPr lang="en-US" sz="1500" dirty="0"/>
           </a:p>
@@ -8485,7 +8485,7 @@
                 <a:ea typeface="Calibri" pitchFamily="34" charset="-122"/>
                 <a:cs typeface="Calibri" pitchFamily="34" charset="-120"/>
               </a:rPr>
-              <a:t>Playbooks reorganise the pack's REMEDIATION_OPTIONS and APPLICATION_VALIDATION content and add the gaps from the review. Commands are illustrative and not yet run against our estate.</a:t>
+              <a:t>Depth behind the playbooks: REMEDIATION_OPTIONS.md and APPLICATION_VALIDATION.md. Commands are illustrative and not yet run against our estate.</a:t>
             </a:r>
             <a:endParaRPr lang="en-US" sz="1000" dirty="0"/>
           </a:p>
@@ -10242,7 +10242,7 @@
                   <a:schemeClr val="tx1"/>
                 </a:solidFill>
               </a:rPr>
-              <a:t>D-01, D-02, D-03, D-04, D-07 decided</a:t>
+              <a:t>D-04 and D-16 decided</a:t>
             </a:r>
             <a:endParaRPr lang="en-US" sz="1300" dirty="0"/>
           </a:p>
@@ -10394,6 +10394,24 @@
         <p:txBody>
           <a:bodyPr wrap="square" lIns="0" tIns="0" rIns="0" bIns="0" rtlCol="0" anchor="t"/>
           <a:lstStyle/>
+          <a:p>
+            <a:pPr marL="177800" indent="-177800">
+              <a:spcAft>
+                <a:spcPts val="400"/>
+              </a:spcAft>
+              <a:buSzPct val="100000"/>
+              <a:buChar char="•"/>
+            </a:pPr>
+            <a:r>
+              <a:rPr lang="en-US" sz="1300" dirty="0">
+                <a:solidFill>
+                  <a:schemeClr val="tx1"/>
+                </a:solidFill>
+              </a:rPr>
+              <a:t>D-01–D-03, D-05–D-07, D-12 decided</a:t>
+            </a:r>
+            <a:endParaRPr lang="en-US" sz="1300" dirty="0"/>
+          </a:p>
           <a:p>
             <a:pPr marL="177800" indent="-177800">
               <a:spcAft>
@@ -14298,7 +14316,7 @@
                 <a:ea typeface="Calibri" pitchFamily="34" charset="-122"/>
                 <a:cs typeface="Calibri" pitchFamily="34" charset="-120"/>
               </a:rPr>
-              <a:t>Primary vendor pages could not be fetched from the review environment. Confirm “Secondary” items against the vendor before reissuing the pack. Full source list: REVIEW.md §9.</a:t>
+              <a:t>Primary vendor pages could not be fetched when version 2 was prepared. Confirm “Secondary” items against the vendor before relying on a detail. Sources: the References section of each document.</a:t>
             </a:r>
             <a:endParaRPr lang="en-US" sz="1000" dirty="0"/>
           </a:p>
@@ -16433,7 +16451,7 @@
                 <a:ea typeface="Calibri" pitchFamily="34" charset="-122"/>
                 <a:cs typeface="Calibri" pitchFamily="34" charset="-120"/>
               </a:rPr>
-              <a:t>Sources: Google Security Blog; Mozilla; BleepingComputer; CSO Online; Technobezz (20–23 Oct 2026). Package facts checked directly on 26 Oct (PyPI, crates.io, Go proxy, Ubuntu changelog). See REVIEW.md §2.</a:t>
+              <a:t>Sources: Google Security Blog; Mozilla; BleepingComputer; CSO Online; Technobezz (20–23 Oct 2026). Package facts checked directly on 26 Oct (PyPI, crates.io, Go proxy, Ubuntu changelog). Detail: README.md, Situation as at 26 October.</a:t>
             </a:r>
             <a:endParaRPr lang="en-US" sz="1000" dirty="0"/>
           </a:p>
@@ -17114,7 +17132,7 @@
                 <a:ea typeface="Calibri" pitchFamily="34" charset="-122"/>
                 <a:cs typeface="Calibri" pitchFamily="34" charset="-120"/>
               </a:rPr>
-              <a:t>Sources: Google Security Blog; Mozilla; BleepingComputer; CSO Online; Technobezz (20–23 Oct 2026). Package facts checked directly on 26 Oct (PyPI, crates.io, Go proxy, Ubuntu changelog). See REVIEW.md §2.</a:t>
+              <a:t>Sources: Google Security Blog; Mozilla; BleepingComputer; CSO Online; Technobezz (20–23 Oct 2026). Package facts checked directly on 26 Oct (PyPI, crates.io, Go proxy, Ubuntu changelog). Detail: README.md, Situation as at 26 October.</a:t>
             </a:r>
             <a:endParaRPr lang="en-US" sz="1000" dirty="0"/>
           </a:p>
@@ -19316,7 +19334,7 @@
                 <a:ea typeface="Calibri" pitchFamily="34" charset="-122"/>
                 <a:cs typeface="Calibri" pitchFamily="34" charset="-120"/>
               </a:rPr>
-              <a:t>Sources: Google Security Blog; Mozilla; BleepingComputer; CSO Online; Technobezz (20–23 Oct 2026). Package facts checked directly on 26 Oct (PyPI, crates.io, Go proxy, Ubuntu changelog). See REVIEW.md §2. Not covered: macOS curl result from lilting.ch test, 21 Oct.</a:t>
+              <a:t>Sources: Google Security Blog; Mozilla; BleepingComputer; CSO Online; Technobezz (20–23 Oct 2026). Package facts checked directly on 26 Oct (PyPI, crates.io, Go proxy, Ubuntu changelog). Detail: README.md, Situation as at 26 October. Not covered: macOS curl result from lilting.ch test, 21 Oct.</a:t>
             </a:r>
             <a:endParaRPr lang="en-US" sz="1000" dirty="0"/>
           </a:p>

--- a/eMudhra-response-briefing.pptx
+++ b/eMudhra-response-briefing.pptx
@@ -123,19 +123,19 @@
   <p:extLst>
     <p:ext uri="{521415D9-36F7-43E2-AB2F-B90AF26B5E84}">
       <p14:sectionLst xmlns:p14="http://schemas.microsoft.com/office/powerpoint/2010/main">
-        <p14:section name="Opening" id="{974ebedd-05ac-5213-11bf-cd1b1b9252bc}">
+        <p14:section name="Opening" id="{8669f9d4-04bc-fb2e-113b-3efbed07166a}">
           <p14:sldIdLst>
             <p14:sldId id="256"/>
             <p14:sldId id="257"/>
           </p14:sldIdLst>
         </p14:section>
-        <p14:section name="Situation" id="{2661270e-a879-6dea-eb3a-29f73fb99a81}">
+        <p14:section name="Situation" id="{36f9982f-83fe-e8f9-aaa5-8e534a1ba04d}">
           <p14:sldIdLst>
             <p14:sldId id="258"/>
             <p14:sldId id="259"/>
           </p14:sldIdLst>
         </p14:section>
-        <p14:section name="Approach" id="{4058e593-9648-dc83-1f56-7fd40939ccdf}">
+        <p14:section name="Approach" id="{83b0071c-e7f6-1026-bc46-f7de9a2b7fb3}">
           <p14:sldIdLst>
             <p14:sldId id="260"/>
             <p14:sldId id="261"/>
@@ -146,20 +146,20 @@
             <p14:sldId id="266"/>
           </p14:sldIdLst>
         </p14:section>
-        <p14:section name="Requirements" id="{a9a89081-3cc9-8093-9e83-ff0fd61d89e9}">
+        <p14:section name="Requirements" id="{0682ebc7-b6d1-fb19-448a-8fbc48143029}">
           <p14:sldIdLst>
             <p14:sldId id="267"/>
             <p14:sldId id="268"/>
             <p14:sldId id="269"/>
           </p14:sldIdLst>
         </p14:section>
-        <p14:section name="Plan and decisions" id="{b8f65e06-8559-0d92-666b-78a01a87331e}">
+        <p14:section name="Plan and decisions" id="{963d4476-313c-1c33-5791-30cf3f8d7d53}">
           <p14:sldIdLst>
             <p14:sldId id="270"/>
             <p14:sldId id="271"/>
           </p14:sldIdLst>
         </p14:section>
-        <p14:section name="Appendix" id="{b94797b4-f32e-1053-ade1-d17e16e04319}">
+        <p14:section name="Appendix" id="{a9b84b9e-7890-a785-2c0d-008df3a861d4}">
           <p14:sldIdLst>
             <p14:sldId id="272"/>
           </p14:sldIdLst>
@@ -568,7 +568,7 @@
           <a:p>
             <a:r>
               <a:rPr lang="en-US" dirty="0"/>
-              <a:t>Purpose: agree how we prioritise, what every service owner returns, and the decisions we need this week. The browser and OS vendors have done most of the work for desktops. Our job is to confirm that coverage and then find the software that keeps its own trust list. This deck summarises version 2 of the eMudhraResponse pack (26 October); the markdown documents hold the detail and references.</a:t>
+              <a:t>Purpose: agree how we prioritise, what every service owner returns, and the decisions we need this week. The browser and OS vendors have done most of the work for desktops. Our job is to confirm that coverage and then find the software that keeps its own trust list. This deck summarises version 2.2 of the eMudhraResponse pack (27 October); the markdown documents hold the detail and references.</a:t>
             </a:r>
             <a:endParaRPr lang="en-US" dirty="0"/>
           </a:p>
@@ -1184,7 +1184,7 @@
           <a:p>
             <a:r>
               <a:rPr lang="en-US" dirty="0"/>
-              <a:t>These eight decisions unblock the first week. D-04 and D-16 (service desk only, no all-staff notice) are needed today because of the Chrome change tomorrow. Record the decision, rationale and date in the workbook so the incident has an audit trail.</a:t>
+              <a:t>These eight decisions unblock the first week. D-04 and D-16 (service desk only, no all-staff notice) are needed immediately because of the 26–27 October root removals. Record the decision, rationale and date in the workbook so the incident has an audit trail.</a:t>
             </a:r>
             <a:endParaRPr lang="en-US" dirty="0"/>
           </a:p>
@@ -1448,7 +1448,7 @@
           <a:p>
             <a:r>
               <a:rPr lang="en-US" dirty="0"/>
-              <a:t>Two clocks matter. The exposure clock started when the weak keys were generated in April 2025, which is why a retrospective hunt is worth doing. The response clock ran 17 to 20 October for browsers and operating systems. Tomorrow's Chrome root removal is about availability, not security: legitimate sites with certificates under that root will fail in Chrome. Note that one recovered key has been published on GitHub.</a:t>
+              <a:t>Two clocks matter. The exposure clock started when the weak keys were generated in April 2025, which is why a retrospective hunt is worth doing. The response clock ran 17 to 20 October for browsers and operating systems. The 26–27 October root removals by Microsoft (Windows, Edge) and Google (Chrome) are about availability, not security: legitimate sites with certificates under those roots fail. Note that one recovered key has been published on GitHub.</a:t>
             </a:r>
             <a:endParaRPr lang="en-US" dirty="0"/>
           </a:p>
@@ -1888,7 +1888,7 @@
           <a:p>
             <a:r>
               <a:rPr lang="en-US" dirty="0"/>
-              <a:t>How to read this: find the row for impact and the column for how the verifier stands today; the cell gives the priority and a typical example. Two things move a system. Confirming an OS update moves it from B to A, so a high-impact .NET payment client goes from P1 to P3 once the Microsoft block is confirmed on its hosts. Updating or rebuilding a bundle moves C to A or B. High-impact systems are P1 in every column except A, and unassessed high-impact systems are scheduled at P1 until we know. The vendor-blocked column is P3 or P4 because the work is only confirming coverage under the browser proviso. Systems that are not applicable at all, such as a serve-only website, close through Route C and don't appear in the grid. The windows are indicative for approval (D-03). Worked cases: RISK_TIERS.md sections 4 and 6.</a:t>
+              <a:t>How to read this: find the row for impact and the column for how the verifier stands today; the cell gives the priority and a typical example. Two things move a system. Confirming an OS update moves it from B to A, so the Windows API validating JWTs goes from P1 to P3 once Microsoft's 20 and 26 October updates are confirmed on its hosts and both the emSign and AAA routes test clean. The same applies on every platform: a Go service is A once rebuilt on 1.27.3 and tested, a Python service once certifi 2026.10.18 or later is deployed and workers restarted. Updating or rebuilding a bundle moves C to A or B. High-impact systems are P1 in every column except A, and unassessed high-impact systems are scheduled at P1 until we know. Column A is P3 or P4 because the work is only confirming coverage under the browser proviso. Systems that are not applicable at all, such as a serve-only website, close through Route C and don't appear in the grid. The windows are indicative for approval (D-03). Worked cases: RISK_TIERS.md sections 4 and 6.</a:t>
             </a:r>
             <a:endParaRPr lang="en-US" dirty="0"/>
           </a:p>
@@ -2389,7 +2389,7 @@
                 <a:ea typeface="Calibri" pitchFamily="34" charset="-122"/>
                 <a:cs typeface="Calibri" pitchFamily="34" charset="-120"/>
               </a:rPr>
-              <a:t>Draft for discussion · 26 Oct 2026</a:t>
+              <a:t>Draft for discussion · 27 Oct 2026</a:t>
             </a:r>
             <a:endParaRPr lang="en-US" sz="1000" dirty="0"/>
           </a:p>
@@ -3077,7 +3077,7 @@
                 <a:ea typeface="Calibri" pitchFamily="34" charset="-122"/>
                 <a:cs typeface="Calibri" pitchFamily="34" charset="-120"/>
               </a:rPr>
-              <a:t>Senior IT management and service owners · 26 October 2026</a:t>
+              <a:t>Senior IT management and service owners · Version 2.2 · 27 October 2026</a:t>
             </a:r>
             <a:endParaRPr lang="en-US" sz="1400" dirty="0"/>
           </a:p>
@@ -3134,7 +3134,7 @@
         <p:spPr>
           <a:xfrm>
             <a:off x="457200" y="292608"/>
-            <a:ext cx="2747772" cy="256032"/>
+            <a:ext cx="2359152" cy="256032"/>
           </a:xfrm>
           <a:prstGeom prst="roundRect">
             <a:avLst>
@@ -3156,7 +3156,7 @@
         <p:spPr>
           <a:xfrm>
             <a:off x="457200" y="292608"/>
-            <a:ext cx="2747772" cy="256032"/>
+            <a:ext cx="2359152" cy="256032"/>
           </a:xfrm>
           <a:prstGeom prst="rect">
             <a:avLst/>
@@ -3177,7 +3177,7 @@
                   <a:schemeClr val="accent5"/>
                 </a:solidFill>
               </a:rPr>
-              <a:t>AVAILABILITY · TUESDAY 27 OCTOBER</a:t>
+              <a:t>AVAILABILITY · 26–27 OCTOBER</a:t>
             </a:r>
             <a:endParaRPr lang="en-US" sz="1000" dirty="0"/>
           </a:p>
@@ -3218,7 +3218,7 @@
                 <a:ea typeface="Cambria" pitchFamily="34" charset="-122"/>
                 <a:cs typeface="Cambria" pitchFamily="34" charset="-120"/>
               </a:rPr>
-              <a:t>Chrome stops trusting emSign ECC Root CA - G3 tomorrow, and legitimate sites will break</a:t>
+              <a:t>Chrome, Edge and Windows have stopped trusting emSign root certificates, so legitimate sites will break</a:t>
             </a:r>
             <a:endParaRPr lang="en-US" sz="2400" dirty="0"/>
           </a:p>
@@ -3300,7 +3300,7 @@
                 <a:ea typeface="Calibri" pitchFamily="34" charset="-122"/>
                 <a:cs typeface="Calibri" pitchFamily="34" charset="-120"/>
               </a:rPr>
-              <a:t>Sources: Google Security Blog (root removal, ~30,000 estimate). certifi and webpki-roots contents checked 26 Oct on PyPI and crates.io.</a:t>
+              <a:t>Sources: Google Security Blog (root removal, ~30,000 estimate); Microsoft Security Response Center (Windows and Edge removals); The Hacker News (eMudhra exit). certifi and webpki-roots contents checked on PyPI and crates.io.</a:t>
             </a:r>
             <a:endParaRPr lang="en-US" sz="1000" dirty="0"/>
           </a:p>
@@ -3395,7 +3395,7 @@
                   <a:schemeClr val="bg1"/>
                 </a:solidFill>
               </a:rPr>
-              <a:t>Chrome Root Store drops emSign ECC Root CA - G3</a:t>
+              <a:t>Chrome and Edge drop emSign root certificates (Windows on 26 Oct)</a:t>
             </a:r>
             <a:endParaRPr lang="en-US" sz="1500" dirty="0"/>
           </a:p>
@@ -3585,6 +3585,24 @@
                 </a:solidFill>
               </a:rPr>
               <a:t>Replace now with another public CA (D-04)</a:t>
+            </a:r>
+            <a:endParaRPr lang="en-US" sz="1300" dirty="0"/>
+          </a:p>
+          <a:p>
+            <a:pPr marL="177800" indent="-177800">
+              <a:spcAft>
+                <a:spcPts val="400"/>
+              </a:spcAft>
+              <a:buSzPct val="100000"/>
+              <a:buChar char="•"/>
+            </a:pPr>
+            <a:r>
+              <a:rPr lang="en-US" sz="1300" dirty="0">
+                <a:solidFill>
+                  <a:schemeClr val="tx2"/>
+                </a:solidFill>
+              </a:rPr>
+              <a:t>eMudhra is leaving the TLS business: plan to replace all its certificates</a:t>
             </a:r>
             <a:endParaRPr lang="en-US" sz="1300" dirty="0"/>
           </a:p>
@@ -8217,7 +8235,7 @@
                             <a:schemeClr val="tx1"/>
                           </a:solidFill>
                         </a:rPr>
-                        <a:t>Publish Route A records per build; distribute disallowed certs where auto-update is off</a:t>
+                        <a:t>Route A record per build; disconnected Windows servers: install the 26 Oct out-of-band update</a:t>
                       </a:r>
                       <a:endParaRPr lang="en-US" sz="1200" dirty="0"/>
                     </a:p>
@@ -11200,7 +11218,7 @@
                   <a:srgbClr val="CADCFC"/>
                 </a:solidFill>
               </a:rPr>
-              <a:t>Today and tomorrow</a:t>
+              <a:t>Immediate</a:t>
             </a:r>
             <a:endParaRPr lang="en-US" sz="1700" dirty="0"/>
           </a:p>
@@ -15211,7 +15229,7 @@
                   <a:schemeClr val="accent5"/>
                 </a:solidFill>
               </a:rPr>
-              <a:t>APPENDIX · FACTS AS AT 26 OCTOBER 2026</a:t>
+              <a:t>APPENDIX · FACTS AS AT 27 OCTOBER 2026</a:t>
             </a:r>
             <a:endParaRPr lang="en-US" sz="1000" dirty="0"/>
           </a:p>
@@ -15252,7 +15270,7 @@
                 <a:ea typeface="Cambria" pitchFamily="34" charset="-122"/>
                 <a:cs typeface="Cambria" pitchFamily="34" charset="-120"/>
               </a:rPr>
-              <a:t>Package facts were checked directly; vendor actions come from press reports of vendor statements</a:t>
+              <a:t>Release and package facts were checked directly; vendor actions come from vendor statements and press reports</a:t>
             </a:r>
             <a:endParaRPr lang="en-US" sz="2400" dirty="0"/>
           </a:p>
@@ -15367,7 +15385,7 @@
                 <a:gridCol w="7022592"/>
                 <a:gridCol w="2926080"/>
               </a:tblGrid>
-              <a:tr h="402336">
+              <a:tr h="365760">
                 <a:tc>
                   <a:txBody>
                     <a:bodyPr/>
@@ -15552,7 +15570,7 @@
                   </a:tcPr>
                 </a:tc>
               </a:tr>
-              <a:tr h="402336">
+              <a:tr h="365760">
                 <a:tc>
                   <a:txBody>
                     <a:bodyPr/>
@@ -15737,7 +15755,7 @@
                   </a:tcPr>
                 </a:tc>
               </a:tr>
-              <a:tr h="402336">
+              <a:tr h="365760">
                 <a:tc>
                   <a:txBody>
                     <a:bodyPr/>
@@ -15922,7 +15940,7 @@
                   </a:tcPr>
                 </a:tc>
               </a:tr>
-              <a:tr h="402336">
+              <a:tr h="365760">
                 <a:tc>
                   <a:txBody>
                     <a:bodyPr/>
@@ -16107,192 +16125,7 @@
                   </a:tcPr>
                 </a:tc>
               </a:tr>
-              <a:tr h="402336">
-                <a:tc>
-                  <a:txBody>
-                    <a:bodyPr/>
-                    <a:lstStyle/>
-                    <a:p>
-                      <a:pPr indent="0" marL="0">
-                        <a:buNone/>
-                      </a:pPr>
-                      <a:r>
-                        <a:rPr lang="en-US" sz="1200" b="1" dirty="0">
-                          <a:solidFill>
-                            <a:schemeClr val="tx1"/>
-                          </a:solidFill>
-                        </a:rPr>
-                        <a:t>19 Oct</a:t>
-                      </a:r>
-                      <a:endParaRPr lang="en-US" sz="1200" dirty="0"/>
-                    </a:p>
-                  </a:txBody>
-                  <a:tcPr marL="76200" marR="76200" marT="38100" marB="38100" anchor="ctr">
-                    <a:lnL w="6350" cap="flat" cmpd="sng" algn="ctr">
-                      <a:solidFill>
-                        <a:srgbClr val="C9D1DD"/>
-                      </a:solidFill>
-                      <a:prstDash val="solid"/>
-                      <a:round/>
-                      <a:headEnd type="none" w="med" len="med"/>
-                      <a:tailEnd type="none" w="med" len="med"/>
-                    </a:lnL>
-                    <a:lnR w="6350" cap="flat" cmpd="sng" algn="ctr">
-                      <a:solidFill>
-                        <a:srgbClr val="C9D1DD"/>
-                      </a:solidFill>
-                      <a:prstDash val="solid"/>
-                      <a:round/>
-                      <a:headEnd type="none" w="med" len="med"/>
-                      <a:tailEnd type="none" w="med" len="med"/>
-                    </a:lnR>
-                    <a:lnT w="6350" cap="flat" cmpd="sng" algn="ctr">
-                      <a:solidFill>
-                        <a:srgbClr val="C9D1DD"/>
-                      </a:solidFill>
-                      <a:prstDash val="solid"/>
-                      <a:round/>
-                      <a:headEnd type="none" w="med" len="med"/>
-                      <a:tailEnd type="none" w="med" len="med"/>
-                    </a:lnT>
-                    <a:lnB w="6350" cap="flat" cmpd="sng" algn="ctr">
-                      <a:solidFill>
-                        <a:srgbClr val="C9D1DD"/>
-                      </a:solidFill>
-                      <a:prstDash val="solid"/>
-                      <a:round/>
-                      <a:headEnd type="none" w="med" len="med"/>
-                      <a:tailEnd type="none" w="med" len="med"/>
-                    </a:lnB>
-                    <a:solidFill>
-                      <a:schemeClr val="bg2"/>
-                    </a:solidFill>
-                  </a:tcPr>
-                </a:tc>
-                <a:tc>
-                  <a:txBody>
-                    <a:bodyPr/>
-                    <a:lstStyle/>
-                    <a:p>
-                      <a:pPr indent="0" marL="0">
-                        <a:buNone/>
-                      </a:pPr>
-                      <a:r>
-                        <a:rPr lang="en-US" sz="1200" dirty="0">
-                          <a:solidFill>
-                            <a:schemeClr val="tx1"/>
-                          </a:solidFill>
-                        </a:rPr>
-                        <a:t>Go 1.27.3 and 1.26.10 published (rebuild required)</a:t>
-                      </a:r>
-                      <a:endParaRPr lang="en-US" sz="1200" dirty="0"/>
-                    </a:p>
-                  </a:txBody>
-                  <a:tcPr marL="76200" marR="76200" marT="38100" marB="38100" anchor="ctr">
-                    <a:lnL w="6350" cap="flat" cmpd="sng" algn="ctr">
-                      <a:solidFill>
-                        <a:srgbClr val="C9D1DD"/>
-                      </a:solidFill>
-                      <a:prstDash val="solid"/>
-                      <a:round/>
-                      <a:headEnd type="none" w="med" len="med"/>
-                      <a:tailEnd type="none" w="med" len="med"/>
-                    </a:lnL>
-                    <a:lnR w="6350" cap="flat" cmpd="sng" algn="ctr">
-                      <a:solidFill>
-                        <a:srgbClr val="C9D1DD"/>
-                      </a:solidFill>
-                      <a:prstDash val="solid"/>
-                      <a:round/>
-                      <a:headEnd type="none" w="med" len="med"/>
-                      <a:tailEnd type="none" w="med" len="med"/>
-                    </a:lnR>
-                    <a:lnT w="6350" cap="flat" cmpd="sng" algn="ctr">
-                      <a:solidFill>
-                        <a:srgbClr val="C9D1DD"/>
-                      </a:solidFill>
-                      <a:prstDash val="solid"/>
-                      <a:round/>
-                      <a:headEnd type="none" w="med" len="med"/>
-                      <a:tailEnd type="none" w="med" len="med"/>
-                    </a:lnT>
-                    <a:lnB w="6350" cap="flat" cmpd="sng" algn="ctr">
-                      <a:solidFill>
-                        <a:srgbClr val="C9D1DD"/>
-                      </a:solidFill>
-                      <a:prstDash val="solid"/>
-                      <a:round/>
-                      <a:headEnd type="none" w="med" len="med"/>
-                      <a:tailEnd type="none" w="med" len="med"/>
-                    </a:lnB>
-                    <a:solidFill>
-                      <a:schemeClr val="bg2"/>
-                    </a:solidFill>
-                  </a:tcPr>
-                </a:tc>
-                <a:tc>
-                  <a:txBody>
-                    <a:bodyPr/>
-                    <a:lstStyle/>
-                    <a:p>
-                      <a:pPr indent="0" marL="0">
-                        <a:buNone/>
-                      </a:pPr>
-                      <a:r>
-                        <a:rPr lang="en-US" sz="1200" dirty="0">
-                          <a:solidFill>
-                            <a:schemeClr val="tx1"/>
-                          </a:solidFill>
-                        </a:rPr>
-                        <a:t>Verified release; secondary content</a:t>
-                      </a:r>
-                      <a:endParaRPr lang="en-US" sz="1200" dirty="0"/>
-                    </a:p>
-                  </a:txBody>
-                  <a:tcPr marL="76200" marR="76200" marT="38100" marB="38100" anchor="ctr">
-                    <a:lnL w="6350" cap="flat" cmpd="sng" algn="ctr">
-                      <a:solidFill>
-                        <a:srgbClr val="C9D1DD"/>
-                      </a:solidFill>
-                      <a:prstDash val="solid"/>
-                      <a:round/>
-                      <a:headEnd type="none" w="med" len="med"/>
-                      <a:tailEnd type="none" w="med" len="med"/>
-                    </a:lnL>
-                    <a:lnR w="6350" cap="flat" cmpd="sng" algn="ctr">
-                      <a:solidFill>
-                        <a:srgbClr val="C9D1DD"/>
-                      </a:solidFill>
-                      <a:prstDash val="solid"/>
-                      <a:round/>
-                      <a:headEnd type="none" w="med" len="med"/>
-                      <a:tailEnd type="none" w="med" len="med"/>
-                    </a:lnR>
-                    <a:lnT w="6350" cap="flat" cmpd="sng" algn="ctr">
-                      <a:solidFill>
-                        <a:srgbClr val="C9D1DD"/>
-                      </a:solidFill>
-                      <a:prstDash val="solid"/>
-                      <a:round/>
-                      <a:headEnd type="none" w="med" len="med"/>
-                      <a:tailEnd type="none" w="med" len="med"/>
-                    </a:lnT>
-                    <a:lnB w="6350" cap="flat" cmpd="sng" algn="ctr">
-                      <a:solidFill>
-                        <a:srgbClr val="C9D1DD"/>
-                      </a:solidFill>
-                      <a:prstDash val="solid"/>
-                      <a:round/>
-                      <a:headEnd type="none" w="med" len="med"/>
-                      <a:tailEnd type="none" w="med" len="med"/>
-                    </a:lnB>
-                    <a:solidFill>
-                      <a:schemeClr val="bg2"/>
-                    </a:solidFill>
-                  </a:tcPr>
-                </a:tc>
-              </a:tr>
-              <a:tr h="402336">
+              <a:tr h="365760">
                 <a:tc>
                   <a:txBody>
                     <a:bodyPr/>
@@ -16350,7 +16183,7 @@
                       <a:tailEnd type="none" w="med" len="med"/>
                     </a:lnB>
                     <a:solidFill>
-                      <a:schemeClr val="bg1"/>
+                      <a:schemeClr val="bg2"/>
                     </a:solidFill>
                   </a:tcPr>
                 </a:tc>
@@ -16368,7 +16201,7 @@
                             <a:schemeClr val="tx1"/>
                           </a:solidFill>
                         </a:rPr>
-                        <a:t>webpki-roots ≥ 1.0.10 and certifi ≥ 2026.10.18 drop emSign ECC Root CA - G3</a:t>
+                        <a:t>Go 1.27.3/1.26.10 published; webpki-roots ≥ 1.0.10 and certifi ≥ 2026.10.18 drop the root</a:t>
                       </a:r>
                       <a:endParaRPr lang="en-US" sz="1200" dirty="0"/>
                     </a:p>
@@ -16411,7 +16244,7 @@
                       <a:tailEnd type="none" w="med" len="med"/>
                     </a:lnB>
                     <a:solidFill>
-                      <a:schemeClr val="bg1"/>
+                      <a:schemeClr val="bg2"/>
                     </a:solidFill>
                   </a:tcPr>
                 </a:tc>
@@ -16429,7 +16262,7 @@
                             <a:schemeClr val="tx1"/>
                           </a:solidFill>
                         </a:rPr>
-                        <a:t>Verified (package contents)</a:t>
+                        <a:t>Verified (releases, package contents)</a:t>
                       </a:r>
                       <a:endParaRPr lang="en-US" sz="1200" dirty="0"/>
                     </a:p>
@@ -16472,12 +16305,12 @@
                       <a:tailEnd type="none" w="med" len="med"/>
                     </a:lnB>
                     <a:solidFill>
-                      <a:schemeClr val="bg1"/>
+                      <a:schemeClr val="bg2"/>
                     </a:solidFill>
                   </a:tcPr>
                 </a:tc>
               </a:tr>
-              <a:tr h="402336">
+              <a:tr h="365760">
                 <a:tc>
                   <a:txBody>
                     <a:bodyPr/>
@@ -16535,7 +16368,7 @@
                       <a:tailEnd type="none" w="med" len="med"/>
                     </a:lnB>
                     <a:solidFill>
-                      <a:schemeClr val="bg2"/>
+                      <a:schemeClr val="bg1"/>
                     </a:solidFill>
                   </a:tcPr>
                 </a:tc>
@@ -16553,7 +16386,131 @@
                             <a:schemeClr val="tx1"/>
                           </a:solidFill>
                         </a:rPr>
-                        <a:t>Microsoft block; Ubuntu 24.04 ca-certificates blocklists the root</a:t>
+                        <a:t>Microsoft Disallowed list update; Ubuntu 24.04 ca-certificates blocklists the root</a:t>
+                      </a:r>
+                      <a:endParaRPr lang="en-US" sz="1200" dirty="0"/>
+                    </a:p>
+                  </a:txBody>
+                  <a:tcPr marL="76200" marR="76200" marT="38100" marB="38100" anchor="ctr">
+                    <a:lnL w="6350" cap="flat" cmpd="sng" algn="ctr">
+                      <a:solidFill>
+                        <a:srgbClr val="C9D1DD"/>
+                      </a:solidFill>
+                      <a:prstDash val="solid"/>
+                      <a:round/>
+                      <a:headEnd type="none" w="med" len="med"/>
+                      <a:tailEnd type="none" w="med" len="med"/>
+                    </a:lnL>
+                    <a:lnR w="6350" cap="flat" cmpd="sng" algn="ctr">
+                      <a:solidFill>
+                        <a:srgbClr val="C9D1DD"/>
+                      </a:solidFill>
+                      <a:prstDash val="solid"/>
+                      <a:round/>
+                      <a:headEnd type="none" w="med" len="med"/>
+                      <a:tailEnd type="none" w="med" len="med"/>
+                    </a:lnR>
+                    <a:lnT w="6350" cap="flat" cmpd="sng" algn="ctr">
+                      <a:solidFill>
+                        <a:srgbClr val="C9D1DD"/>
+                      </a:solidFill>
+                      <a:prstDash val="solid"/>
+                      <a:round/>
+                      <a:headEnd type="none" w="med" len="med"/>
+                      <a:tailEnd type="none" w="med" len="med"/>
+                    </a:lnT>
+                    <a:lnB w="6350" cap="flat" cmpd="sng" algn="ctr">
+                      <a:solidFill>
+                        <a:srgbClr val="C9D1DD"/>
+                      </a:solidFill>
+                      <a:prstDash val="solid"/>
+                      <a:round/>
+                      <a:headEnd type="none" w="med" len="med"/>
+                      <a:tailEnd type="none" w="med" len="med"/>
+                    </a:lnB>
+                    <a:solidFill>
+                      <a:schemeClr val="bg1"/>
+                    </a:solidFill>
+                  </a:tcPr>
+                </a:tc>
+                <a:tc>
+                  <a:txBody>
+                    <a:bodyPr/>
+                    <a:lstStyle/>
+                    <a:p>
+                      <a:pPr indent="0" marL="0">
+                        <a:buNone/>
+                      </a:pPr>
+                      <a:r>
+                        <a:rPr lang="en-US" sz="1200" dirty="0">
+                          <a:solidFill>
+                            <a:schemeClr val="tx1"/>
+                          </a:solidFill>
+                        </a:rPr>
+                        <a:t>Primary (Microsoft); Ubuntu verified</a:t>
+                      </a:r>
+                      <a:endParaRPr lang="en-US" sz="1200" dirty="0"/>
+                    </a:p>
+                  </a:txBody>
+                  <a:tcPr marL="76200" marR="76200" marT="38100" marB="38100" anchor="ctr">
+                    <a:lnL w="6350" cap="flat" cmpd="sng" algn="ctr">
+                      <a:solidFill>
+                        <a:srgbClr val="C9D1DD"/>
+                      </a:solidFill>
+                      <a:prstDash val="solid"/>
+                      <a:round/>
+                      <a:headEnd type="none" w="med" len="med"/>
+                      <a:tailEnd type="none" w="med" len="med"/>
+                    </a:lnL>
+                    <a:lnR w="6350" cap="flat" cmpd="sng" algn="ctr">
+                      <a:solidFill>
+                        <a:srgbClr val="C9D1DD"/>
+                      </a:solidFill>
+                      <a:prstDash val="solid"/>
+                      <a:round/>
+                      <a:headEnd type="none" w="med" len="med"/>
+                      <a:tailEnd type="none" w="med" len="med"/>
+                    </a:lnR>
+                    <a:lnT w="6350" cap="flat" cmpd="sng" algn="ctr">
+                      <a:solidFill>
+                        <a:srgbClr val="C9D1DD"/>
+                      </a:solidFill>
+                      <a:prstDash val="solid"/>
+                      <a:round/>
+                      <a:headEnd type="none" w="med" len="med"/>
+                      <a:tailEnd type="none" w="med" len="med"/>
+                    </a:lnT>
+                    <a:lnB w="6350" cap="flat" cmpd="sng" algn="ctr">
+                      <a:solidFill>
+                        <a:srgbClr val="C9D1DD"/>
+                      </a:solidFill>
+                      <a:prstDash val="solid"/>
+                      <a:round/>
+                      <a:headEnd type="none" w="med" len="med"/>
+                      <a:tailEnd type="none" w="med" len="med"/>
+                    </a:lnB>
+                    <a:solidFill>
+                      <a:schemeClr val="bg1"/>
+                    </a:solidFill>
+                  </a:tcPr>
+                </a:tc>
+              </a:tr>
+              <a:tr h="365760">
+                <a:tc>
+                  <a:txBody>
+                    <a:bodyPr/>
+                    <a:lstStyle/>
+                    <a:p>
+                      <a:pPr indent="0" marL="0">
+                        <a:buNone/>
+                      </a:pPr>
+                      <a:r>
+                        <a:rPr lang="en-US" sz="1200" b="1" dirty="0">
+                          <a:solidFill>
+                            <a:schemeClr val="tx1"/>
+                          </a:solidFill>
+                        </a:rPr>
+                        <a:t>20–21 Oct</a:t>
                       </a:r>
                       <a:endParaRPr lang="en-US" sz="1200" dirty="0"/>
                     </a:p>
@@ -16614,7 +16571,7 @@
                             <a:schemeClr val="tx1"/>
                           </a:solidFill>
                         </a:rPr>
-                        <a:t>Secondary; Ubuntu verified</a:t>
+                        <a:t>Node.js security releases 22.23.4, 24.22.1, 26.12.1 (22.22.0 still trusts the root)</a:t>
                       </a:r>
                       <a:endParaRPr lang="en-US" sz="1200" dirty="0"/>
                     </a:p>
@@ -16658,69 +16615,6 @@
                     </a:lnB>
                     <a:solidFill>
                       <a:schemeClr val="bg2"/>
-                    </a:solidFill>
-                  </a:tcPr>
-                </a:tc>
-              </a:tr>
-              <a:tr h="402336">
-                <a:tc>
-                  <a:txBody>
-                    <a:bodyPr/>
-                    <a:lstStyle/>
-                    <a:p>
-                      <a:pPr indent="0" marL="0">
-                        <a:buNone/>
-                      </a:pPr>
-                      <a:r>
-                        <a:rPr lang="en-US" sz="1200" b="1" dirty="0">
-                          <a:solidFill>
-                            <a:schemeClr val="tx1"/>
-                          </a:solidFill>
-                        </a:rPr>
-                        <a:t>26 Oct</a:t>
-                      </a:r>
-                      <a:endParaRPr lang="en-US" sz="1200" dirty="0"/>
-                    </a:p>
-                  </a:txBody>
-                  <a:tcPr marL="76200" marR="76200" marT="38100" marB="38100" anchor="ctr">
-                    <a:lnL w="6350" cap="flat" cmpd="sng" algn="ctr">
-                      <a:solidFill>
-                        <a:srgbClr val="C9D1DD"/>
-                      </a:solidFill>
-                      <a:prstDash val="solid"/>
-                      <a:round/>
-                      <a:headEnd type="none" w="med" len="med"/>
-                      <a:tailEnd type="none" w="med" len="med"/>
-                    </a:lnL>
-                    <a:lnR w="6350" cap="flat" cmpd="sng" algn="ctr">
-                      <a:solidFill>
-                        <a:srgbClr val="C9D1DD"/>
-                      </a:solidFill>
-                      <a:prstDash val="solid"/>
-                      <a:round/>
-                      <a:headEnd type="none" w="med" len="med"/>
-                      <a:tailEnd type="none" w="med" len="med"/>
-                    </a:lnR>
-                    <a:lnT w="6350" cap="flat" cmpd="sng" algn="ctr">
-                      <a:solidFill>
-                        <a:srgbClr val="C9D1DD"/>
-                      </a:solidFill>
-                      <a:prstDash val="solid"/>
-                      <a:round/>
-                      <a:headEnd type="none" w="med" len="med"/>
-                      <a:tailEnd type="none" w="med" len="med"/>
-                    </a:lnT>
-                    <a:lnB w="6350" cap="flat" cmpd="sng" algn="ctr">
-                      <a:solidFill>
-                        <a:srgbClr val="C9D1DD"/>
-                      </a:solidFill>
-                      <a:prstDash val="solid"/>
-                      <a:round/>
-                      <a:headEnd type="none" w="med" len="med"/>
-                      <a:tailEnd type="none" w="med" len="med"/>
-                    </a:lnB>
-                    <a:solidFill>
-                      <a:schemeClr val="bg1"/>
                     </a:solidFill>
                   </a:tcPr>
                 </a:tc>
@@ -16738,7 +16632,7 @@
                             <a:schemeClr val="tx1"/>
                           </a:solidFill>
                         </a:rPr>
-                        <a:t>Node.js 22.22.0 built-in roots still include the root</a:t>
+                        <a:t>Releases verified; fix content secondary</a:t>
                       </a:r>
                       <a:endParaRPr lang="en-US" sz="1200" dirty="0"/>
                     </a:p>
@@ -16781,73 +16675,12 @@
                       <a:tailEnd type="none" w="med" len="med"/>
                     </a:lnB>
                     <a:solidFill>
-                      <a:schemeClr val="bg1"/>
-                    </a:solidFill>
-                  </a:tcPr>
-                </a:tc>
-                <a:tc>
-                  <a:txBody>
-                    <a:bodyPr/>
-                    <a:lstStyle/>
-                    <a:p>
-                      <a:pPr indent="0" marL="0">
-                        <a:buNone/>
-                      </a:pPr>
-                      <a:r>
-                        <a:rPr lang="en-US" sz="1200" dirty="0">
-                          <a:solidFill>
-                            <a:schemeClr val="tx1"/>
-                          </a:solidFill>
-                        </a:rPr>
-                        <a:t>Verified</a:t>
-                      </a:r>
-                      <a:endParaRPr lang="en-US" sz="1200" dirty="0"/>
-                    </a:p>
-                  </a:txBody>
-                  <a:tcPr marL="76200" marR="76200" marT="38100" marB="38100" anchor="ctr">
-                    <a:lnL w="6350" cap="flat" cmpd="sng" algn="ctr">
-                      <a:solidFill>
-                        <a:srgbClr val="C9D1DD"/>
-                      </a:solidFill>
-                      <a:prstDash val="solid"/>
-                      <a:round/>
-                      <a:headEnd type="none" w="med" len="med"/>
-                      <a:tailEnd type="none" w="med" len="med"/>
-                    </a:lnL>
-                    <a:lnR w="6350" cap="flat" cmpd="sng" algn="ctr">
-                      <a:solidFill>
-                        <a:srgbClr val="C9D1DD"/>
-                      </a:solidFill>
-                      <a:prstDash val="solid"/>
-                      <a:round/>
-                      <a:headEnd type="none" w="med" len="med"/>
-                      <a:tailEnd type="none" w="med" len="med"/>
-                    </a:lnR>
-                    <a:lnT w="6350" cap="flat" cmpd="sng" algn="ctr">
-                      <a:solidFill>
-                        <a:srgbClr val="C9D1DD"/>
-                      </a:solidFill>
-                      <a:prstDash val="solid"/>
-                      <a:round/>
-                      <a:headEnd type="none" w="med" len="med"/>
-                      <a:tailEnd type="none" w="med" len="med"/>
-                    </a:lnT>
-                    <a:lnB w="6350" cap="flat" cmpd="sng" algn="ctr">
-                      <a:solidFill>
-                        <a:srgbClr val="C9D1DD"/>
-                      </a:solidFill>
-                      <a:prstDash val="solid"/>
-                      <a:round/>
-                      <a:headEnd type="none" w="med" len="med"/>
-                      <a:tailEnd type="none" w="med" len="med"/>
-                    </a:lnB>
-                    <a:solidFill>
-                      <a:schemeClr val="bg1"/>
+                      <a:schemeClr val="bg2"/>
                     </a:solidFill>
                   </a:tcPr>
                 </a:tc>
               </a:tr>
-              <a:tr h="402336">
+              <a:tr h="365760">
                 <a:tc>
                   <a:txBody>
                     <a:bodyPr/>
@@ -16905,6 +16738,191 @@
                       <a:tailEnd type="none" w="med" len="med"/>
                     </a:lnB>
                     <a:solidFill>
+                      <a:schemeClr val="bg1"/>
+                    </a:solidFill>
+                  </a:tcPr>
+                </a:tc>
+                <a:tc>
+                  <a:txBody>
+                    <a:bodyPr/>
+                    <a:lstStyle/>
+                    <a:p>
+                      <a:pPr indent="0" marL="0">
+                        <a:buNone/>
+                      </a:pPr>
+                      <a:r>
+                        <a:rPr lang="en-US" sz="1200" dirty="0">
+                          <a:solidFill>
+                            <a:schemeClr val="tx1"/>
+                          </a:solidFill>
+                        </a:rPr>
+                        <a:t>No confirmed misuse; one key public on GitHub; macOS curl still accepted chain</a:t>
+                      </a:r>
+                      <a:endParaRPr lang="en-US" sz="1200" dirty="0"/>
+                    </a:p>
+                  </a:txBody>
+                  <a:tcPr marL="76200" marR="76200" marT="38100" marB="38100" anchor="ctr">
+                    <a:lnL w="6350" cap="flat" cmpd="sng" algn="ctr">
+                      <a:solidFill>
+                        <a:srgbClr val="C9D1DD"/>
+                      </a:solidFill>
+                      <a:prstDash val="solid"/>
+                      <a:round/>
+                      <a:headEnd type="none" w="med" len="med"/>
+                      <a:tailEnd type="none" w="med" len="med"/>
+                    </a:lnL>
+                    <a:lnR w="6350" cap="flat" cmpd="sng" algn="ctr">
+                      <a:solidFill>
+                        <a:srgbClr val="C9D1DD"/>
+                      </a:solidFill>
+                      <a:prstDash val="solid"/>
+                      <a:round/>
+                      <a:headEnd type="none" w="med" len="med"/>
+                      <a:tailEnd type="none" w="med" len="med"/>
+                    </a:lnR>
+                    <a:lnT w="6350" cap="flat" cmpd="sng" algn="ctr">
+                      <a:solidFill>
+                        <a:srgbClr val="C9D1DD"/>
+                      </a:solidFill>
+                      <a:prstDash val="solid"/>
+                      <a:round/>
+                      <a:headEnd type="none" w="med" len="med"/>
+                      <a:tailEnd type="none" w="med" len="med"/>
+                    </a:lnT>
+                    <a:lnB w="6350" cap="flat" cmpd="sng" algn="ctr">
+                      <a:solidFill>
+                        <a:srgbClr val="C9D1DD"/>
+                      </a:solidFill>
+                      <a:prstDash val="solid"/>
+                      <a:round/>
+                      <a:headEnd type="none" w="med" len="med"/>
+                      <a:tailEnd type="none" w="med" len="med"/>
+                    </a:lnB>
+                    <a:solidFill>
+                      <a:schemeClr val="bg1"/>
+                    </a:solidFill>
+                  </a:tcPr>
+                </a:tc>
+                <a:tc>
+                  <a:txBody>
+                    <a:bodyPr/>
+                    <a:lstStyle/>
+                    <a:p>
+                      <a:pPr indent="0" marL="0">
+                        <a:buNone/>
+                      </a:pPr>
+                      <a:r>
+                        <a:rPr lang="en-US" sz="1200" dirty="0">
+                          <a:solidFill>
+                            <a:schemeClr val="tx1"/>
+                          </a:solidFill>
+                        </a:rPr>
+                        <a:t>Secondary</a:t>
+                      </a:r>
+                      <a:endParaRPr lang="en-US" sz="1200" dirty="0"/>
+                    </a:p>
+                  </a:txBody>
+                  <a:tcPr marL="76200" marR="76200" marT="38100" marB="38100" anchor="ctr">
+                    <a:lnL w="6350" cap="flat" cmpd="sng" algn="ctr">
+                      <a:solidFill>
+                        <a:srgbClr val="C9D1DD"/>
+                      </a:solidFill>
+                      <a:prstDash val="solid"/>
+                      <a:round/>
+                      <a:headEnd type="none" w="med" len="med"/>
+                      <a:tailEnd type="none" w="med" len="med"/>
+                    </a:lnL>
+                    <a:lnR w="6350" cap="flat" cmpd="sng" algn="ctr">
+                      <a:solidFill>
+                        <a:srgbClr val="C9D1DD"/>
+                      </a:solidFill>
+                      <a:prstDash val="solid"/>
+                      <a:round/>
+                      <a:headEnd type="none" w="med" len="med"/>
+                      <a:tailEnd type="none" w="med" len="med"/>
+                    </a:lnR>
+                    <a:lnT w="6350" cap="flat" cmpd="sng" algn="ctr">
+                      <a:solidFill>
+                        <a:srgbClr val="C9D1DD"/>
+                      </a:solidFill>
+                      <a:prstDash val="solid"/>
+                      <a:round/>
+                      <a:headEnd type="none" w="med" len="med"/>
+                      <a:tailEnd type="none" w="med" len="med"/>
+                    </a:lnT>
+                    <a:lnB w="6350" cap="flat" cmpd="sng" algn="ctr">
+                      <a:solidFill>
+                        <a:srgbClr val="C9D1DD"/>
+                      </a:solidFill>
+                      <a:prstDash val="solid"/>
+                      <a:round/>
+                      <a:headEnd type="none" w="med" len="med"/>
+                      <a:tailEnd type="none" w="med" len="med"/>
+                    </a:lnB>
+                    <a:solidFill>
+                      <a:schemeClr val="bg1"/>
+                    </a:solidFill>
+                  </a:tcPr>
+                </a:tc>
+              </a:tr>
+              <a:tr h="365760">
+                <a:tc>
+                  <a:txBody>
+                    <a:bodyPr/>
+                    <a:lstStyle/>
+                    <a:p>
+                      <a:pPr indent="0" marL="0">
+                        <a:buNone/>
+                      </a:pPr>
+                      <a:r>
+                        <a:rPr lang="en-US" sz="1200" b="1" dirty="0">
+                          <a:solidFill>
+                            <a:schemeClr val="tx1"/>
+                          </a:solidFill>
+                        </a:rPr>
+                        <a:t>22 Oct</a:t>
+                      </a:r>
+                      <a:endParaRPr lang="en-US" sz="1200" dirty="0"/>
+                    </a:p>
+                  </a:txBody>
+                  <a:tcPr marL="76200" marR="76200" marT="38100" marB="38100" anchor="ctr">
+                    <a:lnL w="6350" cap="flat" cmpd="sng" algn="ctr">
+                      <a:solidFill>
+                        <a:srgbClr val="C9D1DD"/>
+                      </a:solidFill>
+                      <a:prstDash val="solid"/>
+                      <a:round/>
+                      <a:headEnd type="none" w="med" len="med"/>
+                      <a:tailEnd type="none" w="med" len="med"/>
+                    </a:lnL>
+                    <a:lnR w="6350" cap="flat" cmpd="sng" algn="ctr">
+                      <a:solidFill>
+                        <a:srgbClr val="C9D1DD"/>
+                      </a:solidFill>
+                      <a:prstDash val="solid"/>
+                      <a:round/>
+                      <a:headEnd type="none" w="med" len="med"/>
+                      <a:tailEnd type="none" w="med" len="med"/>
+                    </a:lnR>
+                    <a:lnT w="6350" cap="flat" cmpd="sng" algn="ctr">
+                      <a:solidFill>
+                        <a:srgbClr val="C9D1DD"/>
+                      </a:solidFill>
+                      <a:prstDash val="solid"/>
+                      <a:round/>
+                      <a:headEnd type="none" w="med" len="med"/>
+                      <a:tailEnd type="none" w="med" len="med"/>
+                    </a:lnT>
+                    <a:lnB w="6350" cap="flat" cmpd="sng" algn="ctr">
+                      <a:solidFill>
+                        <a:srgbClr val="C9D1DD"/>
+                      </a:solidFill>
+                      <a:prstDash val="solid"/>
+                      <a:round/>
+                      <a:headEnd type="none" w="med" len="med"/>
+                      <a:tailEnd type="none" w="med" len="med"/>
+                    </a:lnB>
+                    <a:solidFill>
                       <a:schemeClr val="bg2"/>
                     </a:solidFill>
                   </a:tcPr>
@@ -16923,7 +16941,7 @@
                             <a:schemeClr val="tx1"/>
                           </a:solidFill>
                         </a:rPr>
-                        <a:t>No confirmed misuse; one key public on GitHub; macOS curl still accepted chain</a:t>
+                        <a:t>eMudhra announces exit from the global SSL/TLS certificate business</a:t>
                       </a:r>
                       <a:endParaRPr lang="en-US" sz="1200" dirty="0"/>
                     </a:p>
@@ -17032,7 +17050,192 @@
                   </a:tcPr>
                 </a:tc>
               </a:tr>
-              <a:tr h="402336">
+              <a:tr h="365760">
+                <a:tc>
+                  <a:txBody>
+                    <a:bodyPr/>
+                    <a:lstStyle/>
+                    <a:p>
+                      <a:pPr indent="0" marL="0">
+                        <a:buNone/>
+                      </a:pPr>
+                      <a:r>
+                        <a:rPr lang="en-US" sz="1200" b="1" dirty="0">
+                          <a:solidFill>
+                            <a:schemeClr val="tx1"/>
+                          </a:solidFill>
+                        </a:rPr>
+                        <a:t>26 Oct</a:t>
+                      </a:r>
+                      <a:endParaRPr lang="en-US" sz="1200" dirty="0"/>
+                    </a:p>
+                  </a:txBody>
+                  <a:tcPr marL="76200" marR="76200" marT="38100" marB="38100" anchor="ctr">
+                    <a:lnL w="6350" cap="flat" cmpd="sng" algn="ctr">
+                      <a:solidFill>
+                        <a:srgbClr val="C9D1DD"/>
+                      </a:solidFill>
+                      <a:prstDash val="solid"/>
+                      <a:round/>
+                      <a:headEnd type="none" w="med" len="med"/>
+                      <a:tailEnd type="none" w="med" len="med"/>
+                    </a:lnL>
+                    <a:lnR w="6350" cap="flat" cmpd="sng" algn="ctr">
+                      <a:solidFill>
+                        <a:srgbClr val="C9D1DD"/>
+                      </a:solidFill>
+                      <a:prstDash val="solid"/>
+                      <a:round/>
+                      <a:headEnd type="none" w="med" len="med"/>
+                      <a:tailEnd type="none" w="med" len="med"/>
+                    </a:lnR>
+                    <a:lnT w="6350" cap="flat" cmpd="sng" algn="ctr">
+                      <a:solidFill>
+                        <a:srgbClr val="C9D1DD"/>
+                      </a:solidFill>
+                      <a:prstDash val="solid"/>
+                      <a:round/>
+                      <a:headEnd type="none" w="med" len="med"/>
+                      <a:tailEnd type="none" w="med" len="med"/>
+                    </a:lnT>
+                    <a:lnB w="6350" cap="flat" cmpd="sng" algn="ctr">
+                      <a:solidFill>
+                        <a:srgbClr val="C9D1DD"/>
+                      </a:solidFill>
+                      <a:prstDash val="solid"/>
+                      <a:round/>
+                      <a:headEnd type="none" w="med" len="med"/>
+                      <a:tailEnd type="none" w="med" len="med"/>
+                    </a:lnB>
+                    <a:solidFill>
+                      <a:schemeClr val="bg1"/>
+                    </a:solidFill>
+                  </a:tcPr>
+                </a:tc>
+                <a:tc>
+                  <a:txBody>
+                    <a:bodyPr/>
+                    <a:lstStyle/>
+                    <a:p>
+                      <a:pPr indent="0" marL="0">
+                        <a:buNone/>
+                      </a:pPr>
+                      <a:r>
+                        <a:rPr lang="en-US" sz="1200" dirty="0">
+                          <a:solidFill>
+                            <a:schemeClr val="tx1"/>
+                          </a:solidFill>
+                        </a:rPr>
+                        <a:t>Windows out-of-band update removes seven certificates, incl. an AAA cross-sign</a:t>
+                      </a:r>
+                      <a:endParaRPr lang="en-US" sz="1200" dirty="0"/>
+                    </a:p>
+                  </a:txBody>
+                  <a:tcPr marL="76200" marR="76200" marT="38100" marB="38100" anchor="ctr">
+                    <a:lnL w="6350" cap="flat" cmpd="sng" algn="ctr">
+                      <a:solidFill>
+                        <a:srgbClr val="C9D1DD"/>
+                      </a:solidFill>
+                      <a:prstDash val="solid"/>
+                      <a:round/>
+                      <a:headEnd type="none" w="med" len="med"/>
+                      <a:tailEnd type="none" w="med" len="med"/>
+                    </a:lnL>
+                    <a:lnR w="6350" cap="flat" cmpd="sng" algn="ctr">
+                      <a:solidFill>
+                        <a:srgbClr val="C9D1DD"/>
+                      </a:solidFill>
+                      <a:prstDash val="solid"/>
+                      <a:round/>
+                      <a:headEnd type="none" w="med" len="med"/>
+                      <a:tailEnd type="none" w="med" len="med"/>
+                    </a:lnR>
+                    <a:lnT w="6350" cap="flat" cmpd="sng" algn="ctr">
+                      <a:solidFill>
+                        <a:srgbClr val="C9D1DD"/>
+                      </a:solidFill>
+                      <a:prstDash val="solid"/>
+                      <a:round/>
+                      <a:headEnd type="none" w="med" len="med"/>
+                      <a:tailEnd type="none" w="med" len="med"/>
+                    </a:lnT>
+                    <a:lnB w="6350" cap="flat" cmpd="sng" algn="ctr">
+                      <a:solidFill>
+                        <a:srgbClr val="C9D1DD"/>
+                      </a:solidFill>
+                      <a:prstDash val="solid"/>
+                      <a:round/>
+                      <a:headEnd type="none" w="med" len="med"/>
+                      <a:tailEnd type="none" w="med" len="med"/>
+                    </a:lnB>
+                    <a:solidFill>
+                      <a:schemeClr val="bg1"/>
+                    </a:solidFill>
+                  </a:tcPr>
+                </a:tc>
+                <a:tc>
+                  <a:txBody>
+                    <a:bodyPr/>
+                    <a:lstStyle/>
+                    <a:p>
+                      <a:pPr indent="0" marL="0">
+                        <a:buNone/>
+                      </a:pPr>
+                      <a:r>
+                        <a:rPr lang="en-US" sz="1200" dirty="0">
+                          <a:solidFill>
+                            <a:schemeClr val="tx1"/>
+                          </a:solidFill>
+                        </a:rPr>
+                        <a:t>Primary (Microsoft)</a:t>
+                      </a:r>
+                      <a:endParaRPr lang="en-US" sz="1200" dirty="0"/>
+                    </a:p>
+                  </a:txBody>
+                  <a:tcPr marL="76200" marR="76200" marT="38100" marB="38100" anchor="ctr">
+                    <a:lnL w="6350" cap="flat" cmpd="sng" algn="ctr">
+                      <a:solidFill>
+                        <a:srgbClr val="C9D1DD"/>
+                      </a:solidFill>
+                      <a:prstDash val="solid"/>
+                      <a:round/>
+                      <a:headEnd type="none" w="med" len="med"/>
+                      <a:tailEnd type="none" w="med" len="med"/>
+                    </a:lnL>
+                    <a:lnR w="6350" cap="flat" cmpd="sng" algn="ctr">
+                      <a:solidFill>
+                        <a:srgbClr val="C9D1DD"/>
+                      </a:solidFill>
+                      <a:prstDash val="solid"/>
+                      <a:round/>
+                      <a:headEnd type="none" w="med" len="med"/>
+                      <a:tailEnd type="none" w="med" len="med"/>
+                    </a:lnR>
+                    <a:lnT w="6350" cap="flat" cmpd="sng" algn="ctr">
+                      <a:solidFill>
+                        <a:srgbClr val="C9D1DD"/>
+                      </a:solidFill>
+                      <a:prstDash val="solid"/>
+                      <a:round/>
+                      <a:headEnd type="none" w="med" len="med"/>
+                      <a:tailEnd type="none" w="med" len="med"/>
+                    </a:lnT>
+                    <a:lnB w="6350" cap="flat" cmpd="sng" algn="ctr">
+                      <a:solidFill>
+                        <a:srgbClr val="C9D1DD"/>
+                      </a:solidFill>
+                      <a:prstDash val="solid"/>
+                      <a:round/>
+                      <a:headEnd type="none" w="med" len="med"/>
+                      <a:tailEnd type="none" w="med" len="med"/>
+                    </a:lnB>
+                    <a:solidFill>
+                      <a:schemeClr val="bg1"/>
+                    </a:solidFill>
+                  </a:tcPr>
+                </a:tc>
+              </a:tr>
+              <a:tr h="365760">
                 <a:tc>
                   <a:txBody>
                     <a:bodyPr/>
@@ -17090,7 +17293,7 @@
                       <a:tailEnd type="none" w="med" len="med"/>
                     </a:lnB>
                     <a:solidFill>
-                      <a:schemeClr val="bg1"/>
+                      <a:schemeClr val="bg2"/>
                     </a:solidFill>
                   </a:tcPr>
                 </a:tc>
@@ -17108,7 +17311,7 @@
                             <a:schemeClr val="tx1"/>
                           </a:solidFill>
                         </a:rPr>
-                        <a:t>Chrome Root Store removes emSign ECC Root CA - G3 (~30,000 certificates)</a:t>
+                        <a:t>Chrome and Edge remove emSign root certificates (~30,000 certificates to migrate)</a:t>
                       </a:r>
                       <a:endParaRPr lang="en-US" sz="1200" dirty="0"/>
                     </a:p>
@@ -17151,7 +17354,7 @@
                       <a:tailEnd type="none" w="med" len="med"/>
                     </a:lnB>
                     <a:solidFill>
-                      <a:schemeClr val="bg1"/>
+                      <a:schemeClr val="bg2"/>
                     </a:solidFill>
                   </a:tcPr>
                 </a:tc>
@@ -17169,7 +17372,7 @@
                             <a:schemeClr val="tx1"/>
                           </a:solidFill>
                         </a:rPr>
-                        <a:t>Primary (Google)</a:t>
+                        <a:t>Primary (Google, Microsoft)</a:t>
                       </a:r>
                       <a:endParaRPr lang="en-US" sz="1200" dirty="0"/>
                     </a:p>
@@ -17212,7 +17415,7 @@
                       <a:tailEnd type="none" w="med" len="med"/>
                     </a:lnB>
                     <a:solidFill>
-                      <a:schemeClr val="bg1"/>
+                      <a:schemeClr val="bg2"/>
                     </a:solidFill>
                   </a:tcPr>
                 </a:tc>
@@ -17469,7 +17672,7 @@
                 <a:ea typeface="Calibri" pitchFamily="34" charset="-122"/>
                 <a:cs typeface="Calibri" pitchFamily="34" charset="-120"/>
               </a:rPr>
-              <a:t>Sources: Google Security Blog; Mozilla; BleepingComputer; CSO Online; Technobezz (20–23 Oct 2026). Package facts checked directly on 26 Oct (PyPI, crates.io, Go proxy, Ubuntu changelog). Detail: README.md, Situation as at 26 October.</a:t>
+              <a:t>Sources: Google, Mozilla and Microsoft (MSRC) statements; BleepingComputer, CSO Online, Technobezz. Release and package facts checked directly on 26–27 Oct. Detail: README.md, Situation as at 27 October.</a:t>
             </a:r>
             <a:endParaRPr lang="en-US" sz="1000" dirty="0"/>
           </a:p>
@@ -18150,7 +18353,7 @@
                 <a:ea typeface="Calibri" pitchFamily="34" charset="-122"/>
                 <a:cs typeface="Calibri" pitchFamily="34" charset="-120"/>
               </a:rPr>
-              <a:t>Sources: Google Security Blog; Mozilla; BleepingComputer; CSO Online; Technobezz (20–23 Oct 2026). Package facts checked directly on 26 Oct (PyPI, crates.io, Go proxy, Ubuntu changelog). Detail: README.md, Situation as at 26 October.</a:t>
+              <a:t>Sources: Google, Mozilla and Microsoft (MSRC) statements; BleepingComputer, CSO Online, Technobezz. Release and package facts checked directly on 26–27 Oct. Detail: README.md, Situation as at 27 October.</a:t>
             </a:r>
             <a:endParaRPr lang="en-US" sz="1000" dirty="0"/>
           </a:p>
@@ -18620,7 +18823,7 @@
                   <a:schemeClr val="tx2"/>
                 </a:solidFill>
               </a:rPr>
-              <a:t>Microsoft; Ubuntu ca-certificates. Node, Debian still pending</a:t>
+              <a:t>Microsoft Disallowed list; Ubuntu and Node.js fixes. Windows trust-list removal on 26 Oct</a:t>
             </a:r>
             <a:endParaRPr lang="en-US" sz="1200" dirty="0"/>
           </a:p>
@@ -18717,7 +18920,7 @@
                   <a:schemeClr val="tx2"/>
                 </a:solidFill>
               </a:rPr>
-              <a:t>Chrome removes emSign ECC Root CA - G3: legitimate sites under it break</a:t>
+              <a:t>Chrome and Edge remove emSign root certificates: legitimate sites under them break</a:t>
             </a:r>
             <a:endParaRPr lang="en-US" sz="1200" dirty="0"/>
           </a:p>
@@ -20352,7 +20555,7 @@
                 <a:ea typeface="Calibri" pitchFamily="34" charset="-122"/>
                 <a:cs typeface="Calibri" pitchFamily="34" charset="-120"/>
               </a:rPr>
-              <a:t>Sources: Google Security Blog; Mozilla; BleepingComputer; CSO Online; Technobezz (20–23 Oct 2026). Package facts checked directly on 26 Oct (PyPI, crates.io, Go proxy, Ubuntu changelog). Detail: README.md, Situation as at 26 October. Not covered: macOS curl result from lilting.ch test, 21 Oct.</a:t>
+              <a:t>Sources: Google, Mozilla and Microsoft (MSRC) statements; BleepingComputer, CSO Online, Technobezz. Release and package facts checked directly on 26–27 Oct. Detail: README.md, Situation as at 27 October. Not covered: macOS curl result from lilting.ch test, 21 Oct.</a:t>
             </a:r>
             <a:endParaRPr lang="en-US" sz="1000" dirty="0"/>
           </a:p>
@@ -21325,7 +21528,7 @@
                             <a:schemeClr val="tx1"/>
                           </a:solidFill>
                         </a:rPr>
-                        <a:t>Windows / Edge</a:t>
+                        <a:t>Windows</a:t>
                       </a:r>
                       <a:endParaRPr lang="en-US" sz="1300" dirty="0"/>
                     </a:p>
@@ -21386,7 +21589,7 @@
                             <a:schemeClr val="tx1"/>
                           </a:solidFill>
                         </a:rPr>
-                        <a:t>Microsoft block</a:t>
+                        <a:t>Disallowed list; trust-list removal</a:t>
                       </a:r>
                       <a:endParaRPr lang="en-US" sz="1300" dirty="0"/>
                     </a:p>
@@ -21447,7 +21650,7 @@
                             <a:schemeClr val="tx1"/>
                           </a:solidFill>
                         </a:rPr>
-                        <a:t>20 Oct</a:t>
+                        <a:t>20 / 26 Oct</a:t>
                       </a:r>
                       <a:endParaRPr lang="en-US" sz="1300" dirty="0"/>
                     </a:p>
@@ -21491,6 +21694,191 @@
                     </a:lnB>
                     <a:solidFill>
                       <a:schemeClr val="bg1"/>
+                    </a:solidFill>
+                  </a:tcPr>
+                </a:tc>
+              </a:tr>
+              <a:tr h="365760">
+                <a:tc>
+                  <a:txBody>
+                    <a:bodyPr/>
+                    <a:lstStyle/>
+                    <a:p>
+                      <a:pPr indent="0" marL="0">
+                        <a:buNone/>
+                      </a:pPr>
+                      <a:r>
+                        <a:rPr lang="en-US" sz="1300" dirty="0">
+                          <a:solidFill>
+                            <a:schemeClr val="tx1"/>
+                          </a:solidFill>
+                        </a:rPr>
+                        <a:t>Edge</a:t>
+                      </a:r>
+                      <a:endParaRPr lang="en-US" sz="1300" dirty="0"/>
+                    </a:p>
+                  </a:txBody>
+                  <a:tcPr marL="76200" marR="76200" marT="38100" marB="38100" anchor="ctr">
+                    <a:lnL w="6350" cap="flat" cmpd="sng" algn="ctr">
+                      <a:solidFill>
+                        <a:srgbClr val="C9D1DD"/>
+                      </a:solidFill>
+                      <a:prstDash val="solid"/>
+                      <a:round/>
+                      <a:headEnd type="none" w="med" len="med"/>
+                      <a:tailEnd type="none" w="med" len="med"/>
+                    </a:lnL>
+                    <a:lnR w="6350" cap="flat" cmpd="sng" algn="ctr">
+                      <a:solidFill>
+                        <a:srgbClr val="C9D1DD"/>
+                      </a:solidFill>
+                      <a:prstDash val="solid"/>
+                      <a:round/>
+                      <a:headEnd type="none" w="med" len="med"/>
+                      <a:tailEnd type="none" w="med" len="med"/>
+                    </a:lnR>
+                    <a:lnT w="6350" cap="flat" cmpd="sng" algn="ctr">
+                      <a:solidFill>
+                        <a:srgbClr val="C9D1DD"/>
+                      </a:solidFill>
+                      <a:prstDash val="solid"/>
+                      <a:round/>
+                      <a:headEnd type="none" w="med" len="med"/>
+                      <a:tailEnd type="none" w="med" len="med"/>
+                    </a:lnT>
+                    <a:lnB w="6350" cap="flat" cmpd="sng" algn="ctr">
+                      <a:solidFill>
+                        <a:srgbClr val="C9D1DD"/>
+                      </a:solidFill>
+                      <a:prstDash val="solid"/>
+                      <a:round/>
+                      <a:headEnd type="none" w="med" len="med"/>
+                      <a:tailEnd type="none" w="med" len="med"/>
+                    </a:lnB>
+                    <a:solidFill>
+                      <a:schemeClr val="bg2"/>
+                    </a:solidFill>
+                  </a:tcPr>
+                </a:tc>
+                <a:tc>
+                  <a:txBody>
+                    <a:bodyPr/>
+                    <a:lstStyle/>
+                    <a:p>
+                      <a:pPr indent="0" marL="0">
+                        <a:buNone/>
+                      </a:pPr>
+                      <a:r>
+                        <a:rPr lang="en-US" sz="1300" dirty="0">
+                          <a:solidFill>
+                            <a:schemeClr val="tx1"/>
+                          </a:solidFill>
+                        </a:rPr>
+                        <a:t>CRLSet; root removal (availability)</a:t>
+                      </a:r>
+                      <a:endParaRPr lang="en-US" sz="1300" dirty="0"/>
+                    </a:p>
+                  </a:txBody>
+                  <a:tcPr marL="76200" marR="76200" marT="38100" marB="38100" anchor="ctr">
+                    <a:lnL w="6350" cap="flat" cmpd="sng" algn="ctr">
+                      <a:solidFill>
+                        <a:srgbClr val="C9D1DD"/>
+                      </a:solidFill>
+                      <a:prstDash val="solid"/>
+                      <a:round/>
+                      <a:headEnd type="none" w="med" len="med"/>
+                      <a:tailEnd type="none" w="med" len="med"/>
+                    </a:lnL>
+                    <a:lnR w="6350" cap="flat" cmpd="sng" algn="ctr">
+                      <a:solidFill>
+                        <a:srgbClr val="C9D1DD"/>
+                      </a:solidFill>
+                      <a:prstDash val="solid"/>
+                      <a:round/>
+                      <a:headEnd type="none" w="med" len="med"/>
+                      <a:tailEnd type="none" w="med" len="med"/>
+                    </a:lnR>
+                    <a:lnT w="6350" cap="flat" cmpd="sng" algn="ctr">
+                      <a:solidFill>
+                        <a:srgbClr val="C9D1DD"/>
+                      </a:solidFill>
+                      <a:prstDash val="solid"/>
+                      <a:round/>
+                      <a:headEnd type="none" w="med" len="med"/>
+                      <a:tailEnd type="none" w="med" len="med"/>
+                    </a:lnT>
+                    <a:lnB w="6350" cap="flat" cmpd="sng" algn="ctr">
+                      <a:solidFill>
+                        <a:srgbClr val="C9D1DD"/>
+                      </a:solidFill>
+                      <a:prstDash val="solid"/>
+                      <a:round/>
+                      <a:headEnd type="none" w="med" len="med"/>
+                      <a:tailEnd type="none" w="med" len="med"/>
+                    </a:lnB>
+                    <a:solidFill>
+                      <a:schemeClr val="bg2"/>
+                    </a:solidFill>
+                  </a:tcPr>
+                </a:tc>
+                <a:tc>
+                  <a:txBody>
+                    <a:bodyPr/>
+                    <a:lstStyle/>
+                    <a:p>
+                      <a:pPr indent="0" marL="0">
+                        <a:buNone/>
+                      </a:pPr>
+                      <a:r>
+                        <a:rPr lang="en-US" sz="1300" dirty="0">
+                          <a:solidFill>
+                            <a:schemeClr val="tx1"/>
+                          </a:solidFill>
+                        </a:rPr>
+                        <a:t>20 / 27 Oct</a:t>
+                      </a:r>
+                      <a:endParaRPr lang="en-US" sz="1300" dirty="0"/>
+                    </a:p>
+                  </a:txBody>
+                  <a:tcPr marL="76200" marR="76200" marT="38100" marB="38100" anchor="ctr">
+                    <a:lnL w="6350" cap="flat" cmpd="sng" algn="ctr">
+                      <a:solidFill>
+                        <a:srgbClr val="C9D1DD"/>
+                      </a:solidFill>
+                      <a:prstDash val="solid"/>
+                      <a:round/>
+                      <a:headEnd type="none" w="med" len="med"/>
+                      <a:tailEnd type="none" w="med" len="med"/>
+                    </a:lnL>
+                    <a:lnR w="6350" cap="flat" cmpd="sng" algn="ctr">
+                      <a:solidFill>
+                        <a:srgbClr val="C9D1DD"/>
+                      </a:solidFill>
+                      <a:prstDash val="solid"/>
+                      <a:round/>
+                      <a:headEnd type="none" w="med" len="med"/>
+                      <a:tailEnd type="none" w="med" len="med"/>
+                    </a:lnR>
+                    <a:lnT w="6350" cap="flat" cmpd="sng" algn="ctr">
+                      <a:solidFill>
+                        <a:srgbClr val="C9D1DD"/>
+                      </a:solidFill>
+                      <a:prstDash val="solid"/>
+                      <a:round/>
+                      <a:headEnd type="none" w="med" len="med"/>
+                      <a:tailEnd type="none" w="med" len="med"/>
+                    </a:lnT>
+                    <a:lnB w="6350" cap="flat" cmpd="sng" algn="ctr">
+                      <a:solidFill>
+                        <a:srgbClr val="C9D1DD"/>
+                      </a:solidFill>
+                      <a:prstDash val="solid"/>
+                      <a:round/>
+                      <a:headEnd type="none" w="med" len="med"/>
+                      <a:tailEnd type="none" w="med" len="med"/>
+                    </a:lnB>
+                    <a:solidFill>
+                      <a:schemeClr val="bg2"/>
                     </a:solidFill>
                   </a:tcPr>
                 </a:tc>
@@ -21553,7 +21941,7 @@
                       <a:tailEnd type="none" w="med" len="med"/>
                     </a:lnB>
                     <a:solidFill>
-                      <a:schemeClr val="bg2"/>
+                      <a:schemeClr val="bg1"/>
                     </a:solidFill>
                   </a:tcPr>
                 </a:tc>
@@ -21614,7 +22002,7 @@
                       <a:tailEnd type="none" w="med" len="med"/>
                     </a:lnB>
                     <a:solidFill>
-                      <a:schemeClr val="bg2"/>
+                      <a:schemeClr val="bg1"/>
                     </a:solidFill>
                   </a:tcPr>
                 </a:tc>
@@ -21675,7 +22063,7 @@
                       <a:tailEnd type="none" w="med" len="med"/>
                     </a:lnB>
                     <a:solidFill>
-                      <a:schemeClr val="bg2"/>
+                      <a:schemeClr val="bg1"/>
                     </a:solidFill>
                   </a:tcPr>
                 </a:tc>
@@ -24634,7 +25022,7 @@
                   <a:schemeClr val="tx1"/>
                 </a:solidFill>
               </a:rPr>
-              <a:t>Vendor already blocks it</a:t>
+              <a:t>Fix in place and tested</a:t>
             </a:r>
             <a:endParaRPr lang="en-US" sz="1300" dirty="0"/>
           </a:p>
@@ -24670,7 +25058,7 @@
                   <a:schemeClr val="tx2"/>
                 </a:solidFill>
               </a:rPr>
-              <a:t>Chrome, Edge, Firefox, Safari; Windows/Apple stores; Android</a:t>
+              <a:t>Browsers; updated Windows, Apple and Android; a rebuilt Go binary</a:t>
             </a:r>
             <a:endParaRPr lang="en-US" sz="1200" dirty="0"/>
           </a:p>
@@ -24706,7 +25094,7 @@
                   <a:schemeClr val="accent3"/>
                 </a:solidFill>
               </a:rPr>
-              <a:t>Protected if the proviso holds</a:t>
+              <a:t>Protected; confirm coverage</a:t>
             </a:r>
             <a:endParaRPr lang="en-US" sz="1200" dirty="0"/>
           </a:p>
@@ -24834,7 +25222,7 @@
                   <a:schemeClr val="tx2"/>
                 </a:solidFill>
               </a:rPr>
-              <a:t>.NET on Windows, curl, PHP, Ruby, Go on Linux</a:t>
+              <a:t>Windows .NET and PowerShell; Linux curl, PHP, Ruby, Go</a:t>
             </a:r>
             <a:endParaRPr lang="en-US" sz="1200" dirty="0"/>
           </a:p>
@@ -25575,7 +25963,7 @@
                 <a:ea typeface="Calibri" pitchFamily="34" charset="-122"/>
                 <a:cs typeface="Calibri" pitchFamily="34" charset="-120"/>
               </a:rPr>
-              <a:t>Each cell shows the priority and a typical example. Work P1 first; the vendor-blocked column only needs coverage confirmed</a:t>
+              <a:t>Each cell shows the priority and a typical example. Work P1 first; column A only needs coverage confirmed</a:t>
             </a:r>
             <a:endParaRPr lang="en-US" sz="1500" dirty="0"/>
           </a:p>
@@ -25720,7 +26108,7 @@
                             <a:schemeClr val="bg1"/>
                           </a:solidFill>
                         </a:rPr>
-                        <a:t>A · Vendor already blocks it</a:t>
+                        <a:t>A · Fix in place and tested</a:t>
                       </a:r>
                       <a:endParaRPr lang="en-US" sz="1100" dirty="0"/>
                     </a:p>
@@ -26116,7 +26504,7 @@
                             <a:schemeClr val="bg1"/>
                           </a:solidFill>
                         </a:rPr>
-                        <a:t>.NET payment client; Microsoft block confirmed</a:t>
+                        <a:t>Go payment service rebuilt on Go 1.27.3; test passed</a:t>
                       </a:r>
                       <a:endParaRPr lang="en-US" sz="1200" dirty="0"/>
                     </a:p>
@@ -26191,7 +26579,7 @@
                             <a:schemeClr val="bg1"/>
                           </a:solidFill>
                         </a:rPr>
-                        <a:t>API validating JWTs; OS update unconfirmed</a:t>
+                        <a:t>Windows API validating JWTs; Microsoft updates unconfirmed</a:t>
                       </a:r>
                       <a:endParaRPr lang="en-US" sz="1200" dirty="0"/>
                     </a:p>
@@ -27020,7 +27408,7 @@
                             <a:schemeClr val="bg1"/>
                           </a:solidFill>
                         </a:rPr>
-                        <a:t>Kiosk browser</a:t>
+                        <a:t>iPad kiosk on current iOS</a:t>
                       </a:r>
                       <a:endParaRPr lang="en-US" sz="1200" dirty="0"/>
                     </a:p>
